--- a/course/slides/AF-TRACKF-M09/AF-TRACKF-M09-v1.pptx
+++ b/course/slides/AF-TRACKF-M09/AF-TRACKF-M09-v1.pptx
@@ -6790,7 +6790,7 @@
         </p:blipFill>
         <p:spPr>
           <a:xfrm>
-            <a:off x="609600" y="3185160"/>
+            <a:off x="609600" y="3020060"/>
             <a:ext cx="1016000" cy="1016000"/>
           </a:xfrm>
           <a:prstGeom prst="rect">
@@ -6806,7 +6806,7 @@
         </p:nvSpPr>
         <p:spPr>
           <a:xfrm>
-            <a:off x="2070100" y="3147060"/>
+            <a:off x="2070100" y="2981960"/>
             <a:ext cx="9563100" cy="619760"/>
           </a:xfrm>
           <a:prstGeom prst="rect">
@@ -6845,8 +6845,8 @@
         </p:nvSpPr>
         <p:spPr>
           <a:xfrm>
-            <a:off x="2070100" y="3931920"/>
-            <a:ext cx="9563100" cy="355600"/>
+            <a:off x="2070100" y="3766820"/>
+            <a:ext cx="9563100" cy="685800"/>
           </a:xfrm>
           <a:prstGeom prst="rect">
             <a:avLst/>
@@ -6871,7 +6871,23 @@
                 </a:solidFill>
                 <a:latin typeface="Lexend"/>
               </a:rPr>
-              <a:t>Notice who does the watching.</a:t>
+              <a:t>Scripts and AI helpers run the probes, the backups and the counts, and they</a:t>
+            </a:r>
+          </a:p>
+          <a:p>
+            <a:pPr algn="l">
+              <a:lnSpc>
+                <a:spcPts val="2600"/>
+              </a:lnSpc>
+            </a:pPr>
+            <a:r>
+              <a:rPr sz="2000" b="0">
+                <a:solidFill>
+                  <a:srgbClr val="756E65"/>
+                </a:solidFill>
+                <a:latin typeface="Lexend"/>
+              </a:rPr>
+              <a:t>record every result so it can be proved later.</a:t>
             </a:r>
           </a:p>
         </p:txBody>
@@ -9715,7 +9731,7 @@
         </p:blipFill>
         <p:spPr>
           <a:xfrm>
-            <a:off x="609600" y="3185160"/>
+            <a:off x="609600" y="3020060"/>
             <a:ext cx="1016000" cy="1016000"/>
           </a:xfrm>
           <a:prstGeom prst="rect">
@@ -9731,7 +9747,7 @@
         </p:nvSpPr>
         <p:spPr>
           <a:xfrm>
-            <a:off x="2070100" y="3147060"/>
+            <a:off x="2070100" y="2981960"/>
             <a:ext cx="9563100" cy="619760"/>
           </a:xfrm>
           <a:prstGeom prst="rect">
@@ -9770,8 +9786,8 @@
         </p:nvSpPr>
         <p:spPr>
           <a:xfrm>
-            <a:off x="2070100" y="3931920"/>
-            <a:ext cx="9563100" cy="355600"/>
+            <a:off x="2070100" y="3766820"/>
+            <a:ext cx="9563100" cy="685800"/>
           </a:xfrm>
           <a:prstGeom prst="rect">
             <a:avLst/>
@@ -9796,7 +9812,23 @@
                 </a:solidFill>
                 <a:latin typeface="Lexend"/>
               </a:rPr>
-              <a:t>This is called the money line.</a:t>
+              <a:t>It is written on the app's card, which is the one home of the app's facts, and</a:t>
+            </a:r>
+          </a:p>
+          <a:p>
+            <a:pPr algn="l">
+              <a:lnSpc>
+                <a:spcPts val="2600"/>
+              </a:lnSpc>
+            </a:pPr>
+            <a:r>
+              <a:rPr sz="2000" b="0">
+                <a:solidFill>
+                  <a:srgbClr val="756E65"/>
+                </a:solidFill>
+                <a:latin typeface="Lexend"/>
+              </a:rPr>
+              <a:t>it follows a fixed pattern.</a:t>
             </a:r>
           </a:p>
         </p:txBody>
@@ -10242,7 +10274,7 @@
                 </a:solidFill>
                 <a:latin typeface="Lexend"/>
               </a:rPr>
-              <a:t>Who writes the money line?</a:t>
+              <a:t>Not a script and not an AI helper.</a:t>
             </a:r>
           </a:p>
         </p:txBody>
@@ -10688,7 +10720,7 @@
                 </a:solidFill>
                 <a:latin typeface="Lexend"/>
               </a:rPr>
-              <a:t>Let's read one.</a:t>
+              <a:t>Suppose Trimtable's line says in 90, out 140.</a:t>
             </a:r>
           </a:p>
         </p:txBody>
@@ -11053,7 +11085,7 @@
         </p:blipFill>
         <p:spPr>
           <a:xfrm>
-            <a:off x="609600" y="3185160"/>
+            <a:off x="609600" y="3020060"/>
             <a:ext cx="1016000" cy="1016000"/>
           </a:xfrm>
           <a:prstGeom prst="rect">
@@ -11069,7 +11101,7 @@
         </p:nvSpPr>
         <p:spPr>
           <a:xfrm>
-            <a:off x="2070100" y="3147060"/>
+            <a:off x="2070100" y="2981960"/>
             <a:ext cx="9563100" cy="619760"/>
           </a:xfrm>
           <a:prstGeom prst="rect">
@@ -11108,8 +11140,8 @@
         </p:nvSpPr>
         <p:spPr>
           <a:xfrm>
-            <a:off x="2070100" y="3931920"/>
-            <a:ext cx="9563100" cy="355600"/>
+            <a:off x="2070100" y="3766820"/>
+            <a:ext cx="9563100" cy="685800"/>
           </a:xfrm>
           <a:prstGeom prst="rect">
             <a:avLst/>
@@ -11134,7 +11166,23 @@
                 </a:solidFill>
                 <a:latin typeface="Lexend"/>
               </a:rPr>
-              <a:t>Here is the pattern it watches for.</a:t>
+              <a:t>If the money line shows two losing months running, the engine asks the</a:t>
+            </a:r>
+          </a:p>
+          <a:p>
+            <a:pPr algn="l">
+              <a:lnSpc>
+                <a:spcPts val="2600"/>
+              </a:lnSpc>
+            </a:pPr>
+            <a:r>
+              <a:rPr sz="2000" b="0">
+                <a:solidFill>
+                  <a:srgbClr val="756E65"/>
+                </a:solidFill>
+                <a:latin typeface="Lexend"/>
+              </a:rPr>
+              <a:t>Retire question.</a:t>
             </a:r>
           </a:p>
         </p:txBody>
@@ -12384,7 +12432,7 @@
         </p:blipFill>
         <p:spPr>
           <a:xfrm>
-            <a:off x="609600" y="3185160"/>
+            <a:off x="609600" y="3020060"/>
             <a:ext cx="1016000" cy="1016000"/>
           </a:xfrm>
           <a:prstGeom prst="rect">
@@ -12400,7 +12448,7 @@
         </p:nvSpPr>
         <p:spPr>
           <a:xfrm>
-            <a:off x="2070100" y="3147060"/>
+            <a:off x="2070100" y="2981960"/>
             <a:ext cx="9563100" cy="619760"/>
           </a:xfrm>
           <a:prstGeom prst="rect">
@@ -12439,8 +12487,8 @@
         </p:nvSpPr>
         <p:spPr>
           <a:xfrm>
-            <a:off x="2070100" y="3931920"/>
-            <a:ext cx="9563100" cy="355600"/>
+            <a:off x="2070100" y="3766820"/>
+            <a:ext cx="9563100" cy="685800"/>
           </a:xfrm>
           <a:prstGeom prst="rect">
             <a:avLst/>
@@ -12465,7 +12513,23 @@
                 </a:solidFill>
                 <a:latin typeface="Lexend"/>
               </a:rPr>
-              <a:t>Return is not automated yet.</a:t>
+              <a:t>It is a line on the stage 8 checklist, done by an AI helper and answered with</a:t>
+            </a:r>
+          </a:p>
+          <a:p>
+            <a:pPr algn="l">
+              <a:lnSpc>
+                <a:spcPts val="2600"/>
+              </a:lnSpc>
+            </a:pPr>
+            <a:r>
+              <a:rPr sz="2000" b="0">
+                <a:solidFill>
+                  <a:srgbClr val="756E65"/>
+                </a:solidFill>
+                <a:latin typeface="Lexend"/>
+              </a:rPr>
+              <a:t>a dated note in the app's document, in the part about payoff.</a:t>
             </a:r>
           </a:p>
         </p:txBody>
@@ -12830,7 +12894,7 @@
         </p:blipFill>
         <p:spPr>
           <a:xfrm>
-            <a:off x="609600" y="3185160"/>
+            <a:off x="609600" y="3020060"/>
             <a:ext cx="1016000" cy="1016000"/>
           </a:xfrm>
           <a:prstGeom prst="rect">
@@ -12846,7 +12910,7 @@
         </p:nvSpPr>
         <p:spPr>
           <a:xfrm>
-            <a:off x="2070100" y="3147060"/>
+            <a:off x="2070100" y="2981960"/>
             <a:ext cx="9563100" cy="619760"/>
           </a:xfrm>
           <a:prstGeom prst="rect">
@@ -12885,8 +12949,8 @@
         </p:nvSpPr>
         <p:spPr>
           <a:xfrm>
-            <a:off x="2070100" y="3931920"/>
-            <a:ext cx="9563100" cy="355600"/>
+            <a:off x="2070100" y="3766820"/>
+            <a:ext cx="9563100" cy="685800"/>
           </a:xfrm>
           <a:prstGeom prst="rect">
             <a:avLst/>
@@ -12911,7 +12975,23 @@
                 </a:solidFill>
                 <a:latin typeface="Lexend"/>
               </a:rPr>
-              <a:t>One last point matters a great deal.</a:t>
+              <a:t>The money line is a record of what happened, never a forecast of what will</a:t>
+            </a:r>
+          </a:p>
+          <a:p>
+            <a:pPr algn="l">
+              <a:lnSpc>
+                <a:spcPts val="2600"/>
+              </a:lnSpc>
+            </a:pPr>
+            <a:r>
+              <a:rPr sz="2000" b="0">
+                <a:solidFill>
+                  <a:srgbClr val="756E65"/>
+                </a:solidFill>
+                <a:latin typeface="Lexend"/>
+              </a:rPr>
+              <a:t>happen.</a:t>
             </a:r>
           </a:p>
         </p:txBody>
@@ -16663,7 +16743,7 @@
         </p:blipFill>
         <p:spPr>
           <a:xfrm>
-            <a:off x="609600" y="3185160"/>
+            <a:off x="609600" y="3020060"/>
             <a:ext cx="1016000" cy="1016000"/>
           </a:xfrm>
           <a:prstGeom prst="rect">
@@ -16679,7 +16759,7 @@
         </p:nvSpPr>
         <p:spPr>
           <a:xfrm>
-            <a:off x="2070100" y="3147060"/>
+            <a:off x="2070100" y="2981960"/>
             <a:ext cx="9563100" cy="619760"/>
           </a:xfrm>
           <a:prstGeom prst="rect">
@@ -16718,8 +16798,8 @@
         </p:nvSpPr>
         <p:spPr>
           <a:xfrm>
-            <a:off x="2070100" y="3931920"/>
-            <a:ext cx="9563100" cy="355600"/>
+            <a:off x="2070100" y="3766820"/>
+            <a:ext cx="9563100" cy="685800"/>
           </a:xfrm>
           <a:prstGeom prst="rect">
             <a:avLst/>
@@ -16744,7 +16824,23 @@
                 </a:solidFill>
                 <a:latin typeface="Lexend"/>
               </a:rPr>
-              <a:t>Fast does not mean unchecked.</a:t>
+              <a:t>A person still approves the sending of every paid build prompt, exactly as in</a:t>
+            </a:r>
+          </a:p>
+          <a:p>
+            <a:pPr algn="l">
+              <a:lnSpc>
+                <a:spcPts val="2600"/>
+              </a:lnSpc>
+            </a:pPr>
+            <a:r>
+              <a:rPr sz="2000" b="0">
+                <a:solidFill>
+                  <a:srgbClr val="756E65"/>
+                </a:solidFill>
+                <a:latin typeface="Lexend"/>
+              </a:rPr>
+              <a:t>Stage 6.</a:t>
             </a:r>
           </a:p>
         </p:txBody>
@@ -17190,7 +17286,7 @@
                 </a:solidFill>
                 <a:latin typeface="Lexend"/>
               </a:rPr>
-              <a:t>Once no incident is open, the engine puts one question to a person, and this</a:t>
+              <a:t>A yes moves Stayproof out of Rescue and back to Radar, where the daily</a:t>
             </a:r>
           </a:p>
           <a:p>
@@ -17206,7 +17302,7 @@
                 </a:solidFill>
                 <a:latin typeface="Lexend"/>
               </a:rPr>
-              <a:t>is the Back to Operate gate: is the fix proved live?</a:t>
+              <a:t>checks carry on as before.</a:t>
             </a:r>
           </a:p>
         </p:txBody>
@@ -18560,7 +18656,7 @@
                 </a:solidFill>
                 <a:latin typeface="Lexend"/>
               </a:rPr>
-              <a:t>Retiring is not throwing away.</a:t>
+              <a:t>Next comes Recycle, whose room is tagged Parts Back.</a:t>
             </a:r>
           </a:p>
         </p:txBody>
@@ -18925,7 +19021,7 @@
         </p:blipFill>
         <p:spPr>
           <a:xfrm>
-            <a:off x="609600" y="3185160"/>
+            <a:off x="609600" y="3020060"/>
             <a:ext cx="1016000" cy="1016000"/>
           </a:xfrm>
           <a:prstGeom prst="rect">
@@ -18941,7 +19037,7 @@
         </p:nvSpPr>
         <p:spPr>
           <a:xfrm>
-            <a:off x="2070100" y="3147060"/>
+            <a:off x="2070100" y="2981960"/>
             <a:ext cx="9563100" cy="619760"/>
           </a:xfrm>
           <a:prstGeom prst="rect">
@@ -18980,8 +19076,8 @@
         </p:nvSpPr>
         <p:spPr>
           <a:xfrm>
-            <a:off x="2070100" y="3931920"/>
-            <a:ext cx="9563100" cy="355600"/>
+            <a:off x="2070100" y="3766820"/>
+            <a:ext cx="9563100" cy="685800"/>
           </a:xfrm>
           <a:prstGeom prst="rect">
             <a:avLst/>
@@ -19006,7 +19102,23 @@
                 </a:solidFill>
                 <a:latin typeface="Lexend"/>
               </a:rPr>
-              <a:t>Not every idea reaches the lap.</a:t>
+              <a:t>If an idea is killed before any parts exist, for example at the Screen gate, it</a:t>
+            </a:r>
+          </a:p>
+          <a:p>
+            <a:pPr algn="l">
+              <a:lnSpc>
+                <a:spcPts val="2600"/>
+              </a:lnSpc>
+            </a:pPr>
+            <a:r>
+              <a:rPr sz="2000" b="0">
+                <a:solidFill>
+                  <a:srgbClr val="756E65"/>
+                </a:solidFill>
+                <a:latin typeface="Lexend"/>
+              </a:rPr>
+              <a:t>goes to the Recovery room, tagged Killed Or Held.</a:t>
             </a:r>
           </a:p>
         </p:txBody>
@@ -19452,7 +19564,7 @@
                 </a:solidFill>
                 <a:latin typeface="Lexend"/>
               </a:rPr>
-              <a:t>There is one more move, called Re-imagine.</a:t>
+              <a:t>It is a door, not a stamp, meaning nobody has to approve a gate to open it.</a:t>
             </a:r>
           </a:p>
         </p:txBody>
@@ -21841,7 +21953,7 @@
         </p:blipFill>
         <p:spPr>
           <a:xfrm>
-            <a:off x="609600" y="3185160"/>
+            <a:off x="609600" y="3020060"/>
             <a:ext cx="1016000" cy="1016000"/>
           </a:xfrm>
           <a:prstGeom prst="rect">
@@ -21857,7 +21969,7 @@
         </p:nvSpPr>
         <p:spPr>
           <a:xfrm>
-            <a:off x="2070100" y="3147060"/>
+            <a:off x="2070100" y="2981960"/>
             <a:ext cx="9563100" cy="619760"/>
           </a:xfrm>
           <a:prstGeom prst="rect">
@@ -21896,8 +22008,8 @@
         </p:nvSpPr>
         <p:spPr>
           <a:xfrm>
-            <a:off x="2070100" y="3931920"/>
-            <a:ext cx="9563100" cy="355600"/>
+            <a:off x="2070100" y="3766820"/>
+            <a:ext cx="9563100" cy="685800"/>
           </a:xfrm>
           <a:prstGeom prst="rect">
             <a:avLst/>
@@ -21922,7 +22034,23 @@
                 </a:solidFill>
                 <a:latin typeface="Lexend"/>
               </a:rPr>
-              <a:t>Behind the factory sits the engine.</a:t>
+              <a:t>The engine is a script, which means a small program that runs on a timer and</a:t>
+            </a:r>
+          </a:p>
+          <a:p>
+            <a:pPr algn="l">
+              <a:lnSpc>
+                <a:spcPts val="2600"/>
+              </a:lnSpc>
+            </a:pPr>
+            <a:r>
+              <a:rPr sz="2000" b="0">
+                <a:solidFill>
+                  <a:srgbClr val="756E65"/>
+                </a:solidFill>
+                <a:latin typeface="Lexend"/>
+              </a:rPr>
+              <a:t>does the same job the same way each time.</a:t>
             </a:r>
           </a:p>
         </p:txBody>
@@ -23625,7 +23753,7 @@
         </p:blipFill>
         <p:spPr>
           <a:xfrm>
-            <a:off x="609600" y="3185160"/>
+            <a:off x="609600" y="3020060"/>
             <a:ext cx="1016000" cy="1016000"/>
           </a:xfrm>
           <a:prstGeom prst="rect">
@@ -23641,7 +23769,7 @@
         </p:nvSpPr>
         <p:spPr>
           <a:xfrm>
-            <a:off x="2070100" y="3147060"/>
+            <a:off x="2070100" y="2981960"/>
             <a:ext cx="9563100" cy="619760"/>
           </a:xfrm>
           <a:prstGeom prst="rect">
@@ -23680,8 +23808,8 @@
         </p:nvSpPr>
         <p:spPr>
           <a:xfrm>
-            <a:off x="2070100" y="3931920"/>
-            <a:ext cx="9563100" cy="355600"/>
+            <a:off x="2070100" y="3766820"/>
+            <a:ext cx="9563100" cy="685800"/>
           </a:xfrm>
           <a:prstGeom prst="rect">
             <a:avLst/>
@@ -23706,7 +23834,23 @@
                 </a:solidFill>
                 <a:latin typeface="Lexend"/>
               </a:rPr>
-              <a:t>Some checks run once a month.</a:t>
+              <a:t>The app's KPIs, short for key performance indicators, are compared with the</a:t>
+            </a:r>
+          </a:p>
+          <a:p>
+            <a:pPr algn="l">
+              <a:lnSpc>
+                <a:spcPts val="2600"/>
+              </a:lnSpc>
+            </a:pPr>
+            <a:r>
+              <a:rPr sz="2000" b="0">
+                <a:solidFill>
+                  <a:srgbClr val="756E65"/>
+                </a:solidFill>
+                <a:latin typeface="Lexend"/>
+              </a:rPr>
+              <a:t>targets set for it.</a:t>
             </a:r>
           </a:p>
         </p:txBody>
